--- a/vault/blogs/notebooklm-as-a-learning-system/slides.pptx
+++ b/vault/blogs/notebooklm-as-a-learning-system/slides.pptx
@@ -3643,7 +3643,7 @@
                   <a:srgbClr val="FFFFFF"/>
                 </a:solidFill>
               </a:rPr>
-              <a:t>  This is [[glossary/rag]] — retrieval-augmented generation — used as a constraint rather than an enhancement. Most RAG im</a:t>
+              <a:t>  This is RAG (retrieval-augmented generation) — retrieval-augmented generation — used as a constraint rather than an enhancement. Most RAG im</a:t>
             </a:r>
           </a:p>
         </p:txBody>
